--- a/Architecture_Docs/Architecture_Overview.pptx
+++ b/Architecture_Docs/Architecture_Overview.pptx
@@ -3306,7 +3306,7 @@
                 </a:solidFill>
                 <a:latin typeface="Calibri"/>
               </a:rPr>
-              <a:t>hrms.circuvent.com · Architecture &amp; Technical Audit · 2026-08-19</a:t>
+              <a:t>hrms.circuvent.com · Architecture &amp; Technical Audit · 2026-08-20</a:t>
             </a:r>
           </a:p>
         </p:txBody>
@@ -3999,7 +3999,7 @@
                 </a:solidFill>
                 <a:latin typeface="Calibri"/>
               </a:rPr>
-              <a:t>hrms.circuvent.com · Architecture &amp; Technical Audit · 2026-08-19</a:t>
+              <a:t>hrms.circuvent.com · Architecture &amp; Technical Audit · 2026-08-20</a:t>
             </a:r>
           </a:p>
         </p:txBody>
@@ -5550,7 +5550,7 @@
                 </a:solidFill>
                 <a:latin typeface="Calibri"/>
               </a:rPr>
-              <a:t>hrms.circuvent.com · Architecture &amp; Technical Audit · 2026-08-19</a:t>
+              <a:t>hrms.circuvent.com · Architecture &amp; Technical Audit · 2026-08-20</a:t>
             </a:r>
           </a:p>
         </p:txBody>
@@ -6326,7 +6326,7 @@
                 </a:solidFill>
                 <a:latin typeface="Calibri"/>
               </a:rPr>
-              <a:t>hrms.circuvent.com · Architecture &amp; Technical Audit · 2026-08-19</a:t>
+              <a:t>hrms.circuvent.com · Architecture &amp; Technical Audit · 2026-08-20</a:t>
             </a:r>
           </a:p>
         </p:txBody>
@@ -7019,7 +7019,7 @@
                 </a:solidFill>
                 <a:latin typeface="Calibri"/>
               </a:rPr>
-              <a:t>hrms.circuvent.com · Architecture &amp; Technical Audit · 2026-08-19</a:t>
+              <a:t>hrms.circuvent.com · Architecture &amp; Technical Audit · 2026-08-20</a:t>
             </a:r>
           </a:p>
         </p:txBody>
@@ -7712,7 +7712,7 @@
                 </a:solidFill>
                 <a:latin typeface="Calibri"/>
               </a:rPr>
-              <a:t>hrms.circuvent.com · Architecture &amp; Technical Audit · 2026-08-19</a:t>
+              <a:t>hrms.circuvent.com · Architecture &amp; Technical Audit · 2026-08-20</a:t>
             </a:r>
           </a:p>
         </p:txBody>
@@ -8405,7 +8405,7 @@
                 </a:solidFill>
                 <a:latin typeface="Calibri"/>
               </a:rPr>
-              <a:t>hrms.circuvent.com · Architecture &amp; Technical Audit · 2026-08-19</a:t>
+              <a:t>hrms.circuvent.com · Architecture &amp; Technical Audit · 2026-08-20</a:t>
             </a:r>
           </a:p>
         </p:txBody>
@@ -13074,7 +13074,7 @@
                 </a:solidFill>
                 <a:latin typeface="Calibri"/>
               </a:rPr>
-              <a:t>hrms.circuvent.com · Architecture &amp; Technical Audit · 2026-08-19</a:t>
+              <a:t>hrms.circuvent.com · Architecture &amp; Technical Audit · 2026-08-20</a:t>
             </a:r>
           </a:p>
         </p:txBody>
@@ -13767,7 +13767,7 @@
                 </a:solidFill>
                 <a:latin typeface="Calibri"/>
               </a:rPr>
-              <a:t>hrms.circuvent.com · Architecture &amp; Technical Audit · 2026-08-19</a:t>
+              <a:t>hrms.circuvent.com · Architecture &amp; Technical Audit · 2026-08-20</a:t>
             </a:r>
           </a:p>
         </p:txBody>
@@ -14961,7 +14961,7 @@
                 </a:solidFill>
                 <a:latin typeface="Calibri"/>
               </a:rPr>
-              <a:t>hrms.circuvent.com · Architecture &amp; Technical Audit · 2026-08-19</a:t>
+              <a:t>hrms.circuvent.com · Architecture &amp; Technical Audit · 2026-08-20</a:t>
             </a:r>
           </a:p>
         </p:txBody>
@@ -15737,7 +15737,7 @@
                 </a:solidFill>
                 <a:latin typeface="Calibri"/>
               </a:rPr>
-              <a:t>hrms.circuvent.com · Architecture &amp; Technical Audit · 2026-08-19</a:t>
+              <a:t>hrms.circuvent.com · Architecture &amp; Technical Audit · 2026-08-20</a:t>
             </a:r>
           </a:p>
         </p:txBody>
@@ -16118,7 +16118,7 @@
                 </a:solidFill>
                 <a:latin typeface="Calibri"/>
               </a:rPr>
-              <a:t>hrms.circuvent.com · Architecture &amp; Technical Audit · 2026-08-19</a:t>
+              <a:t>hrms.circuvent.com · Architecture &amp; Technical Audit · 2026-08-20</a:t>
             </a:r>
           </a:p>
         </p:txBody>
@@ -17669,7 +17669,7 @@
                 </a:solidFill>
                 <a:latin typeface="Calibri"/>
               </a:rPr>
-              <a:t>hrms.circuvent.com · Architecture &amp; Technical Audit · 2026-08-19</a:t>
+              <a:t>hrms.circuvent.com · Architecture &amp; Technical Audit · 2026-08-20</a:t>
             </a:r>
           </a:p>
         </p:txBody>
@@ -18869,7 +18869,7 @@
                 </a:solidFill>
                 <a:latin typeface="Calibri"/>
               </a:rPr>
-              <a:t>hrms.circuvent.com · Architecture &amp; Technical Audit · 2026-08-19</a:t>
+              <a:t>hrms.circuvent.com · Architecture &amp; Technical Audit · 2026-08-20</a:t>
             </a:r>
           </a:p>
         </p:txBody>
@@ -19562,7 +19562,7 @@
                 </a:solidFill>
                 <a:latin typeface="Calibri"/>
               </a:rPr>
-              <a:t>hrms.circuvent.com · Architecture &amp; Technical Audit · 2026-08-19</a:t>
+              <a:t>hrms.circuvent.com · Architecture &amp; Technical Audit · 2026-08-20</a:t>
             </a:r>
           </a:p>
         </p:txBody>
@@ -20159,7 +20159,7 @@
                 </a:solidFill>
                 <a:latin typeface="Calibri"/>
               </a:rPr>
-              <a:t>hrms.circuvent.com · Architecture &amp; Technical Audit · 2026-08-19</a:t>
+              <a:t>hrms.circuvent.com · Architecture &amp; Technical Audit · 2026-08-20</a:t>
             </a:r>
           </a:p>
         </p:txBody>
@@ -21798,7 +21798,7 @@
                 </a:solidFill>
                 <a:latin typeface="Calibri"/>
               </a:rPr>
-              <a:t>hrms.circuvent.com · Architecture &amp; Technical Audit · 2026-08-19</a:t>
+              <a:t>hrms.circuvent.com · Architecture &amp; Technical Audit · 2026-08-20</a:t>
             </a:r>
           </a:p>
         </p:txBody>
@@ -22491,7 +22491,7 @@
                 </a:solidFill>
                 <a:latin typeface="Calibri"/>
               </a:rPr>
-              <a:t>hrms.circuvent.com · Architecture &amp; Technical Audit · 2026-08-19</a:t>
+              <a:t>hrms.circuvent.com · Architecture &amp; Technical Audit · 2026-08-20</a:t>
             </a:r>
           </a:p>
         </p:txBody>
@@ -23267,7 +23267,7 @@
                 </a:solidFill>
                 <a:latin typeface="Calibri"/>
               </a:rPr>
-              <a:t>hrms.circuvent.com · Architecture &amp; Technical Audit · 2026-08-19</a:t>
+              <a:t>hrms.circuvent.com · Architecture &amp; Technical Audit · 2026-08-20</a:t>
             </a:r>
           </a:p>
         </p:txBody>
